--- a/Smart_Warehouse_Presentation.pptx
+++ b/Smart_Warehouse_Presentation.pptx
@@ -9343,10 +9343,12 @@
             </a:r>
           </a:p>
           <a:p>
-            <a:pPr defTabSz="914400">
+            <a:pPr marL="342900" indent="-342900" defTabSz="914400">
               <a:lnSpc>
                 <a:spcPct val="90000"/>
               </a:lnSpc>
+              <a:buFontTx/>
+              <a:buChar char="-"/>
             </a:pPr>
             <a:r>
               <a:rPr lang="en-US" sz="2400" dirty="0">
@@ -9354,7 +9356,7 @@
                   <a:schemeClr val="tx1"/>
                 </a:solidFill>
               </a:rPr>
-              <a:t>- Omar </a:t>
+              <a:t>Omar </a:t>
             </a:r>
             <a:r>
               <a:rPr lang="en-US" sz="2400" dirty="0" err="1">
@@ -9371,6 +9373,45 @@
                 </a:solidFill>
               </a:rPr>
               <a:t> (231007796)</a:t>
+            </a:r>
+          </a:p>
+          <a:p>
+            <a:pPr marL="342900" indent="-342900" defTabSz="914400">
+              <a:lnSpc>
+                <a:spcPct val="90000"/>
+              </a:lnSpc>
+              <a:buFontTx/>
+              <a:buChar char="-"/>
+            </a:pPr>
+            <a:endParaRPr lang="en-US" sz="2400" dirty="0">
+              <a:solidFill>
+                <a:schemeClr val="tx1"/>
+              </a:solidFill>
+            </a:endParaRPr>
+          </a:p>
+          <a:p>
+            <a:pPr marL="342900" indent="-342900" defTabSz="914400">
+              <a:lnSpc>
+                <a:spcPct val="90000"/>
+              </a:lnSpc>
+              <a:buFontTx/>
+              <a:buChar char="-"/>
+            </a:pPr>
+            <a:r>
+              <a:rPr lang="en-US" sz="2400" dirty="0" err="1">
+                <a:solidFill>
+                  <a:schemeClr val="tx1"/>
+                </a:solidFill>
+              </a:rPr>
+              <a:t>Github</a:t>
+            </a:r>
+            <a:r>
+              <a:rPr lang="en-US" sz="2400" dirty="0">
+                <a:solidFill>
+                  <a:schemeClr val="tx1"/>
+                </a:solidFill>
+              </a:rPr>
+              <a:t> link: https://github.com/AhmedAdelMohamedAbouhussein/Smart-Warehouse-Analytics</a:t>
             </a:r>
           </a:p>
         </p:txBody>
